--- a/assets/figures-editable/c3-c4/c4-e29.pptx
+++ b/assets/figures-editable/c3-c4/c4-e29.pptx
@@ -3104,8 +3104,8 @@
         </p:nvSpPr>
         <p:spPr>
           <a:xfrm>
-            <a:off x="274320" y="137160"/>
-            <a:ext cx="11612880" cy="365760"/>
+            <a:off x="274320" y="118872"/>
+            <a:ext cx="11612880" cy="340105"/>
           </a:xfrm>
           <a:prstGeom prst="rect">
             <a:avLst/>
@@ -3114,7 +3114,7 @@
           <a:effectLst/>
         </p:spPr>
         <p:txBody>
-          <a:bodyPr wrap="square" lIns="27432" rIns="27432" tIns="18288" bIns="18288" anchor="ctr">
+          <a:bodyPr wrap="none" lIns="18288" rIns="18288" tIns="18288" bIns="18288" anchor="t">
             <a:spAutoFit/>
           </a:bodyPr>
           <a:lstStyle/>
@@ -3125,7 +3125,7 @@
               </a:spcAft>
             </a:pPr>
             <a:r>
-              <a:rPr sz="2100" b="0" i="0">
+              <a:rPr sz="1900" b="1" i="0">
                 <a:solidFill>
                   <a:srgbClr val="8EDBD4"/>
                 </a:solidFill>
@@ -3138,22 +3138,630 @@
       </p:sp>
       <p:sp>
         <p:nvSpPr>
-          <p:cNvPr id="3" name="C4-E29 rect 1" descr="sci-ppt:o001"/>
+          <p:cNvPr id="3" name="C4-E29 text 1" descr="sci-ppt:o001"/>
+          <p:cNvSpPr txBox="1"/>
+          <p:nvPr/>
+        </p:nvSpPr>
+        <p:spPr>
+          <a:xfrm>
+            <a:off x="457200" y="914400"/>
+            <a:ext cx="11247120" cy="254889"/>
+          </a:xfrm>
+          <a:prstGeom prst="rect">
+            <a:avLst/>
+          </a:prstGeom>
+          <a:noFill/>
+          <a:effectLst/>
+        </p:spPr>
+        <p:txBody>
+          <a:bodyPr wrap="none" lIns="18288" rIns="18288" tIns="18288" bIns="18288" anchor="t">
+            <a:spAutoFit/>
+          </a:bodyPr>
+          <a:lstStyle/>
+          <a:p>
+            <a:pPr algn="l">
+              <a:spcAft>
+                <a:spcPts val="0"/>
+              </a:spcAft>
+            </a:pPr>
+            <a:r>
+              <a:rPr sz="1350" b="1" i="0">
+                <a:solidFill>
+                  <a:srgbClr val="8EDBD4"/>
+                </a:solidFill>
+                <a:latin typeface="Arial"/>
+              </a:rPr>
+              <a:t>Declared coupling turns jet budgets into payload budgets</a:t>
+            </a:r>
+          </a:p>
+        </p:txBody>
+      </p:sp>
+      <p:sp>
+        <p:nvSpPr>
+          <p:cNvPr id="4" name="C4-E29 round_rect 2" descr="sci-ppt:o002"/>
           <p:cNvSpPr/>
           <p:nvPr/>
         </p:nvSpPr>
         <p:spPr>
           <a:xfrm>
-            <a:off x="594360" y="1417320"/>
-            <a:ext cx="3200400" cy="1325880"/>
-          </a:xfrm>
-          <a:prstGeom prst="rect">
+            <a:off x="457200" y="1463040"/>
+            <a:ext cx="2331720" cy="1005840"/>
+          </a:xfrm>
+          <a:prstGeom prst="roundRect">
             <a:avLst/>
           </a:prstGeom>
           <a:solidFill>
             <a:srgbClr val="213E4B"/>
           </a:solidFill>
-          <a:ln w="19050">
+          <a:ln w="20320">
+            <a:solidFill>
+              <a:srgbClr val="F2B880"/>
+            </a:solidFill>
+          </a:ln>
+          <a:effectLst/>
+        </p:spPr>
+        <p:txBody>
+          <a:bodyPr rtlCol="0" anchor="ctr"/>
+          <a:lstStyle/>
+          <a:p>
+            <a:pPr algn="ctr"/>
+          </a:p>
+        </p:txBody>
+      </p:sp>
+      <p:sp>
+        <p:nvSpPr>
+          <p:cNvPr id="5" name="C4-E29 text 3" descr="sci-ppt:o003"/>
+          <p:cNvSpPr txBox="1"/>
+          <p:nvPr/>
+        </p:nvSpPr>
+        <p:spPr>
+          <a:xfrm>
+            <a:off x="530352" y="1517904"/>
+            <a:ext cx="2185415" cy="254889"/>
+          </a:xfrm>
+          <a:prstGeom prst="rect">
+            <a:avLst/>
+          </a:prstGeom>
+          <a:noFill/>
+          <a:effectLst/>
+        </p:spPr>
+        <p:txBody>
+          <a:bodyPr wrap="none" lIns="18288" rIns="18288" tIns="18288" bIns="18288" anchor="t">
+            <a:spAutoFit/>
+          </a:bodyPr>
+          <a:lstStyle/>
+          <a:p>
+            <a:pPr algn="ctr">
+              <a:spcAft>
+                <a:spcPts val="0"/>
+              </a:spcAft>
+            </a:pPr>
+            <a:r>
+              <a:rPr sz="1350" b="1" i="0">
+                <a:solidFill>
+                  <a:srgbClr val="F2B880"/>
+                </a:solidFill>
+                <a:latin typeface="Arial"/>
+              </a:rPr>
+              <a:t>jet energy</a:t>
+            </a:r>
+          </a:p>
+        </p:txBody>
+      </p:sp>
+      <p:sp>
+        <p:nvSpPr>
+          <p:cNvPr id="6" name="C4-E29 text 4" descr="sci-ppt:o004"/>
+          <p:cNvSpPr txBox="1"/>
+          <p:nvPr/>
+        </p:nvSpPr>
+        <p:spPr>
+          <a:xfrm>
+            <a:off x="530352" y="1791081"/>
+            <a:ext cx="2185415" cy="239395"/>
+          </a:xfrm>
+          <a:prstGeom prst="rect">
+            <a:avLst/>
+          </a:prstGeom>
+          <a:noFill/>
+          <a:effectLst/>
+        </p:spPr>
+        <p:txBody>
+          <a:bodyPr wrap="none" lIns="18288" rIns="18288" tIns="18288" bIns="18288" anchor="t">
+            <a:spAutoFit/>
+          </a:bodyPr>
+          <a:lstStyle/>
+          <a:p>
+            <a:pPr algn="ctr">
+              <a:spcAft>
+                <a:spcPts val="0"/>
+              </a:spcAft>
+            </a:pPr>
+            <a:r>
+              <a:rPr sz="1250" b="0" i="0">
+                <a:solidFill>
+                  <a:srgbClr val="E7F0F3"/>
+                </a:solidFill>
+                <a:latin typeface="Arial"/>
+              </a:rPr>
+              <a:t>Eᵢₙ = 50 nJ</a:t>
+            </a:r>
+          </a:p>
+        </p:txBody>
+      </p:sp>
+      <p:cxnSp>
+        <p:nvCxnSpPr>
+          <p:cNvPr id="7" name="C4-E29 arrow 5" descr="sci-ppt:o005"/>
+          <p:cNvCxnSpPr/>
+          <p:nvPr/>
+        </p:nvCxnSpPr>
+        <p:spPr>
+          <a:xfrm>
+            <a:off x="2816351" y="1965960"/>
+            <a:ext cx="768097" cy="0"/>
+          </a:xfrm>
+          <a:prstGeom prst="line">
+            <a:avLst/>
+          </a:prstGeom>
+          <a:ln w="27940">
+            <a:solidFill>
+              <a:srgbClr val="B4C7D2"/>
+            </a:solidFill>
+            <a:headEnd type="none" w="med" len="med"/>
+            <a:tailEnd type="triangle" w="med" len="med"/>
+          </a:ln>
+          <a:effectLst/>
+        </p:spPr>
+      </p:cxnSp>
+      <p:sp>
+        <p:nvSpPr>
+          <p:cNvPr id="8" name="C4-E29 round_rect 6" descr="sci-ppt:o006"/>
+          <p:cNvSpPr/>
+          <p:nvPr/>
+        </p:nvSpPr>
+        <p:spPr>
+          <a:xfrm>
+            <a:off x="3611879" y="1463040"/>
+            <a:ext cx="2331720" cy="1005840"/>
+          </a:xfrm>
+          <a:prstGeom prst="roundRect">
+            <a:avLst/>
+          </a:prstGeom>
+          <a:solidFill>
+            <a:srgbClr val="213E4B"/>
+          </a:solidFill>
+          <a:ln w="20320">
+            <a:solidFill>
+              <a:srgbClr val="8EDBD4"/>
+            </a:solidFill>
+          </a:ln>
+          <a:effectLst/>
+        </p:spPr>
+        <p:txBody>
+          <a:bodyPr rtlCol="0" anchor="ctr"/>
+          <a:lstStyle/>
+          <a:p>
+            <a:pPr algn="ctr"/>
+          </a:p>
+        </p:txBody>
+      </p:sp>
+      <p:sp>
+        <p:nvSpPr>
+          <p:cNvPr id="9" name="C4-E29 text 7" descr="sci-ppt:o007"/>
+          <p:cNvSpPr txBox="1"/>
+          <p:nvPr/>
+        </p:nvSpPr>
+        <p:spPr>
+          <a:xfrm>
+            <a:off x="3685031" y="1517904"/>
+            <a:ext cx="2185415" cy="254889"/>
+          </a:xfrm>
+          <a:prstGeom prst="rect">
+            <a:avLst/>
+          </a:prstGeom>
+          <a:noFill/>
+          <a:effectLst/>
+        </p:spPr>
+        <p:txBody>
+          <a:bodyPr wrap="none" lIns="18288" rIns="18288" tIns="18288" bIns="18288" anchor="t">
+            <a:spAutoFit/>
+          </a:bodyPr>
+          <a:lstStyle/>
+          <a:p>
+            <a:pPr algn="ctr">
+              <a:spcAft>
+                <a:spcPts val="0"/>
+              </a:spcAft>
+            </a:pPr>
+            <a:r>
+              <a:rPr sz="1350" b="1" i="0">
+                <a:solidFill>
+                  <a:srgbClr val="8EDBD4"/>
+                </a:solidFill>
+                <a:latin typeface="Arial"/>
+              </a:rPr>
+              <a:t>× η_E = 0.20</a:t>
+            </a:r>
+          </a:p>
+        </p:txBody>
+      </p:sp>
+      <p:sp>
+        <p:nvSpPr>
+          <p:cNvPr id="10" name="C4-E29 text 8" descr="sci-ppt:o008"/>
+          <p:cNvSpPr txBox="1"/>
+          <p:nvPr/>
+        </p:nvSpPr>
+        <p:spPr>
+          <a:xfrm>
+            <a:off x="3685031" y="1791081"/>
+            <a:ext cx="2185415" cy="239395"/>
+          </a:xfrm>
+          <a:prstGeom prst="rect">
+            <a:avLst/>
+          </a:prstGeom>
+          <a:noFill/>
+          <a:effectLst/>
+        </p:spPr>
+        <p:txBody>
+          <a:bodyPr wrap="none" lIns="18288" rIns="18288" tIns="18288" bIns="18288" anchor="t">
+            <a:spAutoFit/>
+          </a:bodyPr>
+          <a:lstStyle/>
+          <a:p>
+            <a:pPr algn="ctr">
+              <a:spcAft>
+                <a:spcPts val="0"/>
+              </a:spcAft>
+            </a:pPr>
+            <a:r>
+              <a:rPr sz="1250" b="0" i="0">
+                <a:solidFill>
+                  <a:srgbClr val="E7F0F3"/>
+                </a:solidFill>
+                <a:latin typeface="Arial"/>
+              </a:rPr>
+              <a:t>E_solid = 10.0 nJ</a:t>
+            </a:r>
+          </a:p>
+        </p:txBody>
+      </p:sp>
+      <p:sp>
+        <p:nvSpPr>
+          <p:cNvPr id="11" name="C4-E29 round_rect 9" descr="sci-ppt:o009"/>
+          <p:cNvSpPr/>
+          <p:nvPr/>
+        </p:nvSpPr>
+        <p:spPr>
+          <a:xfrm>
+            <a:off x="6309360" y="1463040"/>
+            <a:ext cx="2331720" cy="1005840"/>
+          </a:xfrm>
+          <a:prstGeom prst="roundRect">
+            <a:avLst/>
+          </a:prstGeom>
+          <a:solidFill>
+            <a:srgbClr val="213E4B"/>
+          </a:solidFill>
+          <a:ln w="20320">
+            <a:solidFill>
+              <a:srgbClr val="F28BA0"/>
+            </a:solidFill>
+          </a:ln>
+          <a:effectLst/>
+        </p:spPr>
+        <p:txBody>
+          <a:bodyPr rtlCol="0" anchor="ctr"/>
+          <a:lstStyle/>
+          <a:p>
+            <a:pPr algn="ctr"/>
+          </a:p>
+        </p:txBody>
+      </p:sp>
+      <p:sp>
+        <p:nvSpPr>
+          <p:cNvPr id="12" name="C4-E29 text 10" descr="sci-ppt:o010"/>
+          <p:cNvSpPr txBox="1"/>
+          <p:nvPr/>
+        </p:nvSpPr>
+        <p:spPr>
+          <a:xfrm>
+            <a:off x="6382512" y="1517904"/>
+            <a:ext cx="2185415" cy="254889"/>
+          </a:xfrm>
+          <a:prstGeom prst="rect">
+            <a:avLst/>
+          </a:prstGeom>
+          <a:noFill/>
+          <a:effectLst/>
+        </p:spPr>
+        <p:txBody>
+          <a:bodyPr wrap="none" lIns="18288" rIns="18288" tIns="18288" bIns="18288" anchor="t">
+            <a:spAutoFit/>
+          </a:bodyPr>
+          <a:lstStyle/>
+          <a:p>
+            <a:pPr algn="ctr">
+              <a:spcAft>
+                <a:spcPts val="0"/>
+              </a:spcAft>
+            </a:pPr>
+            <a:r>
+              <a:rPr sz="1350" b="1" i="0">
+                <a:solidFill>
+                  <a:srgbClr val="F28BA0"/>
+                </a:solidFill>
+                <a:latin typeface="Arial"/>
+              </a:rPr>
+              <a:t>jet impulse</a:t>
+            </a:r>
+          </a:p>
+        </p:txBody>
+      </p:sp>
+      <p:sp>
+        <p:nvSpPr>
+          <p:cNvPr id="13" name="C4-E29 text 11" descr="sci-ppt:o011"/>
+          <p:cNvSpPr txBox="1"/>
+          <p:nvPr/>
+        </p:nvSpPr>
+        <p:spPr>
+          <a:xfrm>
+            <a:off x="6382512" y="1791081"/>
+            <a:ext cx="2185415" cy="239395"/>
+          </a:xfrm>
+          <a:prstGeom prst="rect">
+            <a:avLst/>
+          </a:prstGeom>
+          <a:noFill/>
+          <a:effectLst/>
+        </p:spPr>
+        <p:txBody>
+          <a:bodyPr wrap="none" lIns="18288" rIns="18288" tIns="18288" bIns="18288" anchor="t">
+            <a:spAutoFit/>
+          </a:bodyPr>
+          <a:lstStyle/>
+          <a:p>
+            <a:pPr algn="ctr">
+              <a:spcAft>
+                <a:spcPts val="0"/>
+              </a:spcAft>
+            </a:pPr>
+            <a:r>
+              <a:rPr sz="1250" b="0" i="0">
+                <a:solidFill>
+                  <a:srgbClr val="E7F0F3"/>
+                </a:solidFill>
+                <a:latin typeface="Arial"/>
+              </a:rPr>
+              <a:t>Iᵢₙ = 3.1333 nN s</a:t>
+            </a:r>
+          </a:p>
+        </p:txBody>
+      </p:sp>
+      <p:cxnSp>
+        <p:nvCxnSpPr>
+          <p:cNvPr id="14" name="C4-E29 arrow 12" descr="sci-ppt:o012"/>
+          <p:cNvCxnSpPr/>
+          <p:nvPr/>
+        </p:nvCxnSpPr>
+        <p:spPr>
+          <a:xfrm>
+            <a:off x="8668511" y="1965960"/>
+            <a:ext cx="768097" cy="0"/>
+          </a:xfrm>
+          <a:prstGeom prst="line">
+            <a:avLst/>
+          </a:prstGeom>
+          <a:ln w="27940">
+            <a:solidFill>
+              <a:srgbClr val="B4C7D2"/>
+            </a:solidFill>
+            <a:headEnd type="none" w="med" len="med"/>
+            <a:tailEnd type="triangle" w="med" len="med"/>
+          </a:ln>
+          <a:effectLst/>
+        </p:spPr>
+      </p:cxnSp>
+      <p:sp>
+        <p:nvSpPr>
+          <p:cNvPr id="15" name="C4-E29 round_rect 13" descr="sci-ppt:o013"/>
+          <p:cNvSpPr/>
+          <p:nvPr/>
+        </p:nvSpPr>
+        <p:spPr>
+          <a:xfrm>
+            <a:off x="9464040" y="1463040"/>
+            <a:ext cx="2331720" cy="1005840"/>
+          </a:xfrm>
+          <a:prstGeom prst="roundRect">
+            <a:avLst/>
+          </a:prstGeom>
+          <a:solidFill>
+            <a:srgbClr val="213E4B"/>
+          </a:solidFill>
+          <a:ln w="20320">
+            <a:solidFill>
+              <a:srgbClr val="7FC8F8"/>
+            </a:solidFill>
+          </a:ln>
+          <a:effectLst/>
+        </p:spPr>
+        <p:txBody>
+          <a:bodyPr rtlCol="0" anchor="ctr"/>
+          <a:lstStyle/>
+          <a:p>
+            <a:pPr algn="ctr"/>
+          </a:p>
+        </p:txBody>
+      </p:sp>
+      <p:sp>
+        <p:nvSpPr>
+          <p:cNvPr id="16" name="C4-E29 text 14" descr="sci-ppt:o014"/>
+          <p:cNvSpPr txBox="1"/>
+          <p:nvPr/>
+        </p:nvSpPr>
+        <p:spPr>
+          <a:xfrm>
+            <a:off x="9537192" y="1517904"/>
+            <a:ext cx="2185415" cy="254889"/>
+          </a:xfrm>
+          <a:prstGeom prst="rect">
+            <a:avLst/>
+          </a:prstGeom>
+          <a:noFill/>
+          <a:effectLst/>
+        </p:spPr>
+        <p:txBody>
+          <a:bodyPr wrap="none" lIns="18288" rIns="18288" tIns="18288" bIns="18288" anchor="t">
+            <a:spAutoFit/>
+          </a:bodyPr>
+          <a:lstStyle/>
+          <a:p>
+            <a:pPr algn="ctr">
+              <a:spcAft>
+                <a:spcPts val="0"/>
+              </a:spcAft>
+            </a:pPr>
+            <a:r>
+              <a:rPr sz="1350" b="1" i="0">
+                <a:solidFill>
+                  <a:srgbClr val="7FC8F8"/>
+                </a:solidFill>
+                <a:latin typeface="Arial"/>
+              </a:rPr>
+              <a:t>× η_I = 0.50</a:t>
+            </a:r>
+          </a:p>
+        </p:txBody>
+      </p:sp>
+      <p:sp>
+        <p:nvSpPr>
+          <p:cNvPr id="17" name="C4-E29 text 15" descr="sci-ppt:o015"/>
+          <p:cNvSpPr txBox="1"/>
+          <p:nvPr/>
+        </p:nvSpPr>
+        <p:spPr>
+          <a:xfrm>
+            <a:off x="9537192" y="1791081"/>
+            <a:ext cx="2185415" cy="239395"/>
+          </a:xfrm>
+          <a:prstGeom prst="rect">
+            <a:avLst/>
+          </a:prstGeom>
+          <a:noFill/>
+          <a:effectLst/>
+        </p:spPr>
+        <p:txBody>
+          <a:bodyPr wrap="none" lIns="18288" rIns="18288" tIns="18288" bIns="18288" anchor="t">
+            <a:spAutoFit/>
+          </a:bodyPr>
+          <a:lstStyle/>
+          <a:p>
+            <a:pPr algn="ctr">
+              <a:spcAft>
+                <a:spcPts val="0"/>
+              </a:spcAft>
+            </a:pPr>
+            <a:r>
+              <a:rPr sz="1250" b="0" i="0">
+                <a:solidFill>
+                  <a:srgbClr val="E7F0F3"/>
+                </a:solidFill>
+                <a:latin typeface="Arial"/>
+              </a:rPr>
+              <a:t>Iₙₑₜ = 1.5666 nN s</a:t>
+            </a:r>
+          </a:p>
+        </p:txBody>
+      </p:sp>
+      <p:sp>
+        <p:nvSpPr>
+          <p:cNvPr id="18" name="C4-E29 round_rect 16" descr="sci-ppt:o016"/>
+          <p:cNvSpPr/>
+          <p:nvPr/>
+        </p:nvSpPr>
+        <p:spPr>
+          <a:xfrm>
+            <a:off x="457200" y="2926080"/>
+            <a:ext cx="5486400" cy="2103120"/>
+          </a:xfrm>
+          <a:prstGeom prst="roundRect">
+            <a:avLst/>
+          </a:prstGeom>
+          <a:solidFill>
+            <a:srgbClr val="213E4B"/>
+          </a:solidFill>
+          <a:ln w="20320">
+            <a:solidFill>
+              <a:srgbClr val="8EDBD4"/>
+            </a:solidFill>
+          </a:ln>
+          <a:effectLst/>
+        </p:spPr>
+        <p:txBody>
+          <a:bodyPr rtlCol="0" anchor="ctr"/>
+          <a:lstStyle/>
+          <a:p>
+            <a:pPr algn="ctr"/>
+          </a:p>
+        </p:txBody>
+      </p:sp>
+      <p:sp>
+        <p:nvSpPr>
+          <p:cNvPr id="19" name="C4-E29 text 17" descr="sci-ppt:o017"/>
+          <p:cNvSpPr txBox="1"/>
+          <p:nvPr/>
+        </p:nvSpPr>
+        <p:spPr>
+          <a:xfrm>
+            <a:off x="566928" y="2980944"/>
+            <a:ext cx="5266944" cy="247142"/>
+          </a:xfrm>
+          <a:prstGeom prst="rect">
+            <a:avLst/>
+          </a:prstGeom>
+          <a:noFill/>
+          <a:effectLst/>
+        </p:spPr>
+        <p:txBody>
+          <a:bodyPr wrap="none" lIns="18288" rIns="18288" tIns="18288" bIns="18288" anchor="t">
+            <a:spAutoFit/>
+          </a:bodyPr>
+          <a:lstStyle/>
+          <a:p>
+            <a:pPr algn="l">
+              <a:spcAft>
+                <a:spcPts val="0"/>
+              </a:spcAft>
+            </a:pPr>
+            <a:r>
+              <a:rPr sz="1300" b="1" i="0">
+                <a:solidFill>
+                  <a:srgbClr val="8EDBD4"/>
+                </a:solidFill>
+                <a:latin typeface="Arial"/>
+              </a:rPr>
+              <a:t>The film mass</a:t>
+            </a:r>
+          </a:p>
+        </p:txBody>
+      </p:sp>
+      <p:sp>
+        <p:nvSpPr>
+          <p:cNvPr id="20" name="C4-E29 rect 18" descr="sci-ppt:o018"/>
+          <p:cNvSpPr/>
+          <p:nvPr/>
+        </p:nvSpPr>
+        <p:spPr>
+          <a:xfrm>
+            <a:off x="914400" y="3749039"/>
+            <a:ext cx="1828800" cy="201168"/>
+          </a:xfrm>
+          <a:prstGeom prst="rect">
+            <a:avLst/>
+          </a:prstGeom>
+          <a:solidFill>
+            <a:srgbClr val="3A5362"/>
+          </a:solidFill>
+          <a:ln w="17780">
             <a:solidFill>
               <a:srgbClr val="B4C7D2"/>
             </a:solidFill>
@@ -3170,14 +3778,14 @@
       </p:sp>
       <p:sp>
         <p:nvSpPr>
-          <p:cNvPr id="4" name="C4-E29 text 2" descr="sci-ppt:o002"/>
+          <p:cNvPr id="21" name="C4-E29 text 19" descr="sci-ppt:o019"/>
           <p:cNvSpPr txBox="1"/>
           <p:nvPr/>
         </p:nvSpPr>
         <p:spPr>
           <a:xfrm>
-            <a:off x="758952" y="1627632"/>
-            <a:ext cx="2871216" cy="914400"/>
+            <a:off x="2926080" y="3429000"/>
+            <a:ext cx="2926080" cy="386588"/>
           </a:xfrm>
           <a:prstGeom prst="rect">
             <a:avLst/>
@@ -3186,7 +3794,7 @@
           <a:effectLst/>
         </p:spPr>
         <p:txBody>
-          <a:bodyPr wrap="square" lIns="27432" rIns="27432" tIns="18288" bIns="18288" anchor="ctr">
+          <a:bodyPr wrap="none" lIns="18288" rIns="18288" tIns="18288" bIns="18288" anchor="t">
             <a:spAutoFit/>
           </a:bodyPr>
           <a:lstStyle/>
@@ -3197,61 +3805,93 @@
               </a:spcAft>
             </a:pPr>
             <a:r>
-              <a:rPr sz="1800" b="0" i="0">
+              <a:rPr sz="1100" b="0" i="0">
                 <a:solidFill>
                   <a:srgbClr val="E7F0F3"/>
                 </a:solidFill>
                 <a:latin typeface="Arial"/>
               </a:rPr>
-              <a:t>Incoming finite budgets</a:t>
-            </a:r>
-          </a:p>
-        </p:txBody>
-      </p:sp>
-      <p:cxnSp>
-        <p:nvCxnSpPr>
-          <p:cNvPr id="5" name="C4-E29 arrow 3" descr="sci-ppt:o003"/>
-          <p:cNvCxnSpPr/>
+              <a:t>A_f = 1.00 mm² = 1.00×10⁻⁶ m²</a:t>
+            </a:r>
+          </a:p>
+          <a:p>
+            <a:pPr algn="l">
+              <a:spcAft>
+                <a:spcPts val="0"/>
+              </a:spcAft>
+            </a:pPr>
+            <a:r>
+              <a:rPr sz="1100" b="0" i="0">
+                <a:solidFill>
+                  <a:srgbClr val="E7F0F3"/>
+                </a:solidFill>
+                <a:latin typeface="Arial"/>
+              </a:rPr>
+              <a:t>h_f = 1.00 µm, ρ_f = 2330 kg/m³</a:t>
+            </a:r>
+          </a:p>
+        </p:txBody>
+      </p:sp>
+      <p:sp>
+        <p:nvSpPr>
+          <p:cNvPr id="22" name="C4-E29 text 20" descr="sci-ppt:o020"/>
+          <p:cNvSpPr txBox="1"/>
           <p:nvPr/>
-        </p:nvCxnSpPr>
-        <p:spPr>
-          <a:xfrm>
-            <a:off x="3794760" y="2057400"/>
-            <a:ext cx="640080" cy="0"/>
-          </a:xfrm>
-          <a:prstGeom prst="line">
+        </p:nvSpPr>
+        <p:spPr>
+          <a:xfrm>
+            <a:off x="594360" y="4389120"/>
+            <a:ext cx="5303520" cy="223900"/>
+          </a:xfrm>
+          <a:prstGeom prst="rect">
             <a:avLst/>
           </a:prstGeom>
-          <a:ln w="25400">
-            <a:solidFill>
-              <a:srgbClr val="8EDBD4"/>
-            </a:solidFill>
-            <a:headEnd type="none" w="med" len="med"/>
-            <a:tailEnd type="triangle" w="med" len="med"/>
-          </a:ln>
+          <a:noFill/>
           <a:effectLst/>
         </p:spPr>
-      </p:cxnSp>
-      <p:sp>
-        <p:nvSpPr>
-          <p:cNvPr id="6" name="C4-E29 rect 4" descr="sci-ppt:o004"/>
+        <p:txBody>
+          <a:bodyPr wrap="none" lIns="18288" rIns="18288" tIns="18288" bIns="18288" anchor="t">
+            <a:spAutoFit/>
+          </a:bodyPr>
+          <a:lstStyle/>
+          <a:p>
+            <a:pPr algn="l">
+              <a:spcAft>
+                <a:spcPts val="0"/>
+              </a:spcAft>
+            </a:pPr>
+            <a:r>
+              <a:rPr sz="1150" b="1" i="0">
+                <a:solidFill>
+                  <a:srgbClr val="F2B880"/>
+                </a:solidFill>
+                <a:latin typeface="Arial"/>
+              </a:rPr>
+              <a:t>m_f = ρ_f A_f h_f = (2330)(1.00×10⁻⁶)(1.00×10⁻⁶) = 2.33×10⁻⁹ kg</a:t>
+            </a:r>
+          </a:p>
+        </p:txBody>
+      </p:sp>
+      <p:sp>
+        <p:nvSpPr>
+          <p:cNvPr id="23" name="C4-E29 round_rect 21" descr="sci-ppt:o021"/>
           <p:cNvSpPr/>
           <p:nvPr/>
         </p:nvSpPr>
         <p:spPr>
           <a:xfrm>
-            <a:off x="4480560" y="1417320"/>
-            <a:ext cx="3200400" cy="1325880"/>
-          </a:xfrm>
-          <a:prstGeom prst="rect">
+            <a:off x="6217920" y="2926080"/>
+            <a:ext cx="5486400" cy="2103120"/>
+          </a:xfrm>
+          <a:prstGeom prst="roundRect">
             <a:avLst/>
           </a:prstGeom>
           <a:solidFill>
             <a:srgbClr val="213E4B"/>
           </a:solidFill>
-          <a:ln w="19050">
+          <a:ln w="20320">
             <a:solidFill>
-              <a:srgbClr val="B4C7D2"/>
+              <a:srgbClr val="F2B880"/>
             </a:solidFill>
           </a:ln>
           <a:effectLst/>
@@ -3266,14 +3906,14 @@
       </p:sp>
       <p:sp>
         <p:nvSpPr>
-          <p:cNvPr id="7" name="C4-E29 text 5" descr="sci-ppt:o005"/>
+          <p:cNvPr id="24" name="C4-E29 text 22" descr="sci-ppt:o022"/>
           <p:cNvSpPr txBox="1"/>
           <p:nvPr/>
         </p:nvSpPr>
         <p:spPr>
           <a:xfrm>
-            <a:off x="4645152" y="1627632"/>
-            <a:ext cx="2871216" cy="914400"/>
+            <a:off x="6327648" y="2980944"/>
+            <a:ext cx="5266944" cy="247142"/>
           </a:xfrm>
           <a:prstGeom prst="rect">
             <a:avLst/>
@@ -3282,7 +3922,7 @@
           <a:effectLst/>
         </p:spPr>
         <p:txBody>
-          <a:bodyPr wrap="square" lIns="27432" rIns="27432" tIns="18288" bIns="18288" anchor="ctr">
+          <a:bodyPr wrap="none" lIns="18288" rIns="18288" tIns="18288" bIns="18288" anchor="t">
             <a:spAutoFit/>
           </a:bodyPr>
           <a:lstStyle/>
@@ -3293,65 +3933,97 @@
               </a:spcAft>
             </a:pPr>
             <a:r>
-              <a:rPr sz="1800" b="0" i="0">
+              <a:rPr sz="1300" b="1" i="0">
+                <a:solidFill>
+                  <a:srgbClr val="F2B880"/>
+                </a:solidFill>
+                <a:latin typeface="Arial"/>
+              </a:rPr>
+              <a:t>What the factors mean</a:t>
+            </a:r>
+          </a:p>
+        </p:txBody>
+      </p:sp>
+      <p:sp>
+        <p:nvSpPr>
+          <p:cNvPr id="25" name="C4-E29 text 23" descr="sci-ppt:o023"/>
+          <p:cNvSpPr txBox="1"/>
+          <p:nvPr/>
+        </p:nvSpPr>
+        <p:spPr>
+          <a:xfrm>
+            <a:off x="6556248" y="3383280"/>
+            <a:ext cx="5010912" cy="417576"/>
+          </a:xfrm>
+          <a:prstGeom prst="rect">
+            <a:avLst/>
+          </a:prstGeom>
+          <a:noFill/>
+          <a:effectLst/>
+        </p:spPr>
+        <p:txBody>
+          <a:bodyPr wrap="none" lIns="18288" rIns="18288" tIns="18288" bIns="18288" anchor="t">
+            <a:spAutoFit/>
+          </a:bodyPr>
+          <a:lstStyle/>
+          <a:p>
+            <a:pPr algn="l">
+              <a:spcAft>
+                <a:spcPts val="0"/>
+              </a:spcAft>
+            </a:pPr>
+            <a:r>
+              <a:rPr sz="1200" b="0" i="0">
                 <a:solidFill>
                   <a:srgbClr val="E7F0F3"/>
                 </a:solidFill>
                 <a:latin typeface="Arial"/>
               </a:rPr>
-              <a:t>Transmitted E_solid, I_net</a:t>
-            </a:r>
-          </a:p>
-        </p:txBody>
-      </p:sp>
-      <p:cxnSp>
-        <p:nvCxnSpPr>
-          <p:cNvPr id="8" name="C4-E29 arrow 6" descr="sci-ppt:o006"/>
-          <p:cNvCxnSpPr/>
+              <a:t>η_E, η_I are declared fractions of energy and impulse that</a:t>
+            </a:r>
+          </a:p>
+          <a:p>
+            <a:pPr algn="l">
+              <a:spcAft>
+                <a:spcPts val="0"/>
+              </a:spcAft>
+            </a:pPr>
+            <a:r>
+              <a:rPr sz="1200" b="0" i="0">
+                <a:solidFill>
+                  <a:srgbClr val="E7F0F3"/>
+                </a:solidFill>
+                <a:latin typeface="Arial"/>
+              </a:rPr>
+              <a:t>reach the film.</a:t>
+            </a:r>
+          </a:p>
+        </p:txBody>
+      </p:sp>
+      <p:sp>
+        <p:nvSpPr>
+          <p:cNvPr id="26" name="C4-E29 ellipse 24" descr="sci-ppt:o024"/>
+          <p:cNvSpPr/>
           <p:nvPr/>
-        </p:nvCxnSpPr>
-        <p:spPr>
-          <a:xfrm>
-            <a:off x="7680960" y="2057400"/>
-            <a:ext cx="640080" cy="0"/>
-          </a:xfrm>
-          <a:prstGeom prst="line">
+        </p:nvSpPr>
+        <p:spPr>
+          <a:xfrm>
+            <a:off x="6387084" y="3436620"/>
+            <a:ext cx="82296" cy="82296"/>
+          </a:xfrm>
+          <a:prstGeom prst="ellipse">
             <a:avLst/>
           </a:prstGeom>
-          <a:ln w="25400">
+          <a:solidFill>
+            <a:srgbClr val="8EDBD4"/>
+          </a:solidFill>
+          <a:ln w="12700">
             <a:solidFill>
               <a:srgbClr val="8EDBD4"/>
             </a:solidFill>
-            <a:headEnd type="none" w="med" len="med"/>
-            <a:tailEnd type="triangle" w="med" len="med"/>
           </a:ln>
           <a:effectLst/>
         </p:spPr>
-      </p:cxnSp>
-      <p:sp>
-        <p:nvSpPr>
-          <p:cNvPr id="9" name="C4-E29 rect 7" descr="sci-ppt:o007"/>
-          <p:cNvSpPr/>
-          <p:nvPr/>
-        </p:nvSpPr>
-        <p:spPr>
-          <a:xfrm>
-            <a:off x="8366760" y="1417320"/>
-            <a:ext cx="3200400" cy="1325880"/>
-          </a:xfrm>
-          <a:prstGeom prst="rect">
-            <a:avLst/>
-          </a:prstGeom>
-          <a:solidFill>
-            <a:srgbClr val="213E4B"/>
-          </a:solidFill>
-          <a:ln w="19050">
-            <a:solidFill>
-              <a:srgbClr val="B4C7D2"/>
-            </a:solidFill>
-          </a:ln>
-          <a:effectLst/>
-        </p:spPr>
         <p:txBody>
           <a:bodyPr rtlCol="0" anchor="ctr"/>
           <a:lstStyle/>
@@ -3362,14 +4034,14 @@
       </p:sp>
       <p:sp>
         <p:nvSpPr>
-          <p:cNvPr id="10" name="C4-E29 text 8" descr="sci-ppt:o008"/>
+          <p:cNvPr id="27" name="C4-E29 text 25" descr="sci-ppt:o025"/>
           <p:cNvSpPr txBox="1"/>
           <p:nvPr/>
         </p:nvSpPr>
         <p:spPr>
           <a:xfrm>
-            <a:off x="8531352" y="1627632"/>
-            <a:ext cx="2871216" cy="914400"/>
+            <a:off x="6556248" y="3846576"/>
+            <a:ext cx="5010912" cy="231648"/>
           </a:xfrm>
           <a:prstGeom prst="rect">
             <a:avLst/>
@@ -3378,7 +4050,7 @@
           <a:effectLst/>
         </p:spPr>
         <p:txBody>
-          <a:bodyPr wrap="square" lIns="27432" rIns="27432" tIns="18288" bIns="18288" anchor="ctr">
+          <a:bodyPr wrap="none" lIns="18288" rIns="18288" tIns="18288" bIns="18288" anchor="t">
             <a:spAutoFit/>
           </a:bodyPr>
           <a:lstStyle/>
@@ -3389,27 +4061,59 @@
               </a:spcAft>
             </a:pPr>
             <a:r>
-              <a:rPr sz="1800" b="0" i="0">
+              <a:rPr sz="1200" b="0" i="0">
                 <a:solidFill>
                   <a:srgbClr val="E7F0F3"/>
                 </a:solidFill>
                 <a:latin typeface="Arial"/>
               </a:rPr>
-              <a:t>Release + departure cost</a:t>
-            </a:r>
-          </a:p>
-        </p:txBody>
-      </p:sp>
-      <p:sp>
-        <p:nvSpPr>
-          <p:cNvPr id="11" name="C4-E29 text 9" descr="sci-ppt:o009"/>
+              <a:t>They are assumptions, not predictions of the model.</a:t>
+            </a:r>
+          </a:p>
+        </p:txBody>
+      </p:sp>
+      <p:sp>
+        <p:nvSpPr>
+          <p:cNvPr id="28" name="C4-E29 ellipse 26" descr="sci-ppt:o026"/>
+          <p:cNvSpPr/>
+          <p:nvPr/>
+        </p:nvSpPr>
+        <p:spPr>
+          <a:xfrm>
+            <a:off x="6387084" y="3899916"/>
+            <a:ext cx="82296" cy="82296"/>
+          </a:xfrm>
+          <a:prstGeom prst="ellipse">
+            <a:avLst/>
+          </a:prstGeom>
+          <a:solidFill>
+            <a:srgbClr val="8EDBD4"/>
+          </a:solidFill>
+          <a:ln w="12700">
+            <a:solidFill>
+              <a:srgbClr val="8EDBD4"/>
+            </a:solidFill>
+          </a:ln>
+          <a:effectLst/>
+        </p:spPr>
+        <p:txBody>
+          <a:bodyPr rtlCol="0" anchor="ctr"/>
+          <a:lstStyle/>
+          <a:p>
+            <a:pPr algn="ctr"/>
+          </a:p>
+        </p:txBody>
+      </p:sp>
+      <p:sp>
+        <p:nvSpPr>
+          <p:cNvPr id="29" name="C4-E29 text 27" descr="sci-ppt:o027"/>
           <p:cNvSpPr txBox="1"/>
           <p:nvPr/>
         </p:nvSpPr>
         <p:spPr>
           <a:xfrm>
-            <a:off x="731520" y="3246120"/>
-            <a:ext cx="10789920" cy="457200"/>
+            <a:off x="457200" y="5303520"/>
+            <a:ext cx="11247120" cy="247142"/>
           </a:xfrm>
           <a:prstGeom prst="rect">
             <a:avLst/>
@@ -3418,7 +4122,7 @@
           <a:effectLst/>
         </p:spPr>
         <p:txBody>
-          <a:bodyPr wrap="square" lIns="27432" rIns="27432" tIns="18288" bIns="18288" anchor="ctr">
+          <a:bodyPr wrap="none" lIns="18288" rIns="18288" tIns="18288" bIns="18288" anchor="t">
             <a:spAutoFit/>
           </a:bodyPr>
           <a:lstStyle/>
@@ -3429,49 +4133,27 @@
               </a:spcAft>
             </a:pPr>
             <a:r>
-              <a:rPr sz="1800" b="0" i="0">
+              <a:rPr sz="1300" b="0" i="0">
                 <a:solidFill>
-                  <a:srgbClr val="8EDBD4"/>
+                  <a:srgbClr val="F2B880"/>
                 </a:solidFill>
                 <a:latin typeface="Arial"/>
               </a:rPr>
-              <a:t>Work, storage, fracture consumption and net impulse retain separate meanings.</a:t>
-            </a:r>
-          </a:p>
-        </p:txBody>
-      </p:sp>
-      <p:cxnSp>
-        <p:nvCxnSpPr>
-          <p:cNvPr id="12" name="C4-E29 line 10" descr="sci-ppt:o010"/>
-          <p:cNvCxnSpPr/>
-          <p:nvPr/>
-        </p:nvCxnSpPr>
-        <p:spPr>
-          <a:xfrm>
-            <a:off x="274320" y="3977639"/>
-            <a:ext cx="11612880" cy="0"/>
-          </a:xfrm>
-          <a:prstGeom prst="line">
-            <a:avLst/>
-          </a:prstGeom>
-          <a:ln w="12700">
-            <a:solidFill>
-              <a:srgbClr val="405967"/>
-            </a:solidFill>
-          </a:ln>
-          <a:effectLst/>
-        </p:spPr>
-      </p:cxnSp>
-      <p:sp>
-        <p:nvSpPr>
-          <p:cNvPr id="13" name="C4-E29 text 11" descr="sci-ppt:o011"/>
+              <a:t>Conditional budgets: every later pass or fail depends on η_E = 0.20 and η_I = 0.50.</a:t>
+            </a:r>
+          </a:p>
+        </p:txBody>
+      </p:sp>
+      <p:sp>
+        <p:nvSpPr>
+          <p:cNvPr id="30" name="C4-E29 text 28" descr="sci-ppt:o028"/>
           <p:cNvSpPr txBox="1"/>
           <p:nvPr/>
         </p:nvSpPr>
         <p:spPr>
           <a:xfrm>
-            <a:off x="320040" y="4096512"/>
-            <a:ext cx="5715000" cy="246888"/>
+            <a:off x="320040" y="6510528"/>
+            <a:ext cx="11521440" cy="200660"/>
           </a:xfrm>
           <a:prstGeom prst="rect">
             <a:avLst/>
@@ -3480,327 +4162,7 @@
           <a:effectLst/>
         </p:spPr>
         <p:txBody>
-          <a:bodyPr wrap="square" lIns="27432" rIns="27432" tIns="18288" bIns="18288" anchor="ctr">
-            <a:spAutoFit/>
-          </a:bodyPr>
-          <a:lstStyle/>
-          <a:p>
-            <a:pPr algn="l">
-              <a:spcAft>
-                <a:spcPts val="0"/>
-              </a:spcAft>
-            </a:pPr>
-            <a:r>
-              <a:rPr sz="1150" b="0" i="0">
-                <a:solidFill>
-                  <a:srgbClr val="B4C7D2"/>
-                </a:solidFill>
-                <a:latin typeface="Arial"/>
-              </a:rPr>
-              <a:t>• A_f = 1 mm² — intended release</a:t>
-            </a:r>
-          </a:p>
-        </p:txBody>
-      </p:sp>
-      <p:sp>
-        <p:nvSpPr>
-          <p:cNvPr id="14" name="C4-E29 text 12" descr="sci-ppt:o012"/>
-          <p:cNvSpPr txBox="1"/>
-          <p:nvPr/>
-        </p:nvSpPr>
-        <p:spPr>
-          <a:xfrm>
-            <a:off x="6217920" y="4096512"/>
-            <a:ext cx="5715000" cy="246888"/>
-          </a:xfrm>
-          <a:prstGeom prst="rect">
-            <a:avLst/>
-          </a:prstGeom>
-          <a:noFill/>
-          <a:effectLst/>
-        </p:spPr>
-        <p:txBody>
-          <a:bodyPr wrap="square" lIns="27432" rIns="27432" tIns="18288" bIns="18288" anchor="ctr">
-            <a:spAutoFit/>
-          </a:bodyPr>
-          <a:lstStyle/>
-          <a:p>
-            <a:pPr algn="l">
-              <a:spcAft>
-                <a:spcPts val="0"/>
-              </a:spcAft>
-            </a:pPr>
-            <a:r>
-              <a:rPr sz="1150" b="0" i="0">
-                <a:solidFill>
-                  <a:srgbClr val="B4C7D2"/>
-                </a:solidFill>
-                <a:latin typeface="Arial"/>
-              </a:rPr>
-              <a:t>• h_f = 1 μm — payload thickness</a:t>
-            </a:r>
-          </a:p>
-        </p:txBody>
-      </p:sp>
-      <p:sp>
-        <p:nvSpPr>
-          <p:cNvPr id="15" name="C4-E29 text 13" descr="sci-ppt:o013"/>
-          <p:cNvSpPr txBox="1"/>
-          <p:nvPr/>
-        </p:nvSpPr>
-        <p:spPr>
-          <a:xfrm>
-            <a:off x="320040" y="4329684"/>
-            <a:ext cx="5715000" cy="246888"/>
-          </a:xfrm>
-          <a:prstGeom prst="rect">
-            <a:avLst/>
-          </a:prstGeom>
-          <a:noFill/>
-          <a:effectLst/>
-        </p:spPr>
-        <p:txBody>
-          <a:bodyPr wrap="square" lIns="27432" rIns="27432" tIns="18288" bIns="18288" anchor="ctr">
-            <a:spAutoFit/>
-          </a:bodyPr>
-          <a:lstStyle/>
-          <a:p>
-            <a:pPr algn="l">
-              <a:spcAft>
-                <a:spcPts val="0"/>
-              </a:spcAft>
-            </a:pPr>
-            <a:r>
-              <a:rPr sz="1150" b="0" i="0">
-                <a:solidFill>
-                  <a:srgbClr val="B4C7D2"/>
-                </a:solidFill>
-                <a:latin typeface="Arial"/>
-              </a:rPr>
-              <a:t>• ρ_f = 2330 kg/m³ → m_f = 2.33 μg</a:t>
-            </a:r>
-          </a:p>
-        </p:txBody>
-      </p:sp>
-      <p:sp>
-        <p:nvSpPr>
-          <p:cNvPr id="16" name="C4-E29 text 14" descr="sci-ppt:o014"/>
-          <p:cNvSpPr txBox="1"/>
-          <p:nvPr/>
-        </p:nvSpPr>
-        <p:spPr>
-          <a:xfrm>
-            <a:off x="6217920" y="4329684"/>
-            <a:ext cx="5715000" cy="246888"/>
-          </a:xfrm>
-          <a:prstGeom prst="rect">
-            <a:avLst/>
-          </a:prstGeom>
-          <a:noFill/>
-          <a:effectLst/>
-        </p:spPr>
-        <p:txBody>
-          <a:bodyPr wrap="square" lIns="27432" rIns="27432" tIns="18288" bIns="18288" anchor="ctr">
-            <a:spAutoFit/>
-          </a:bodyPr>
-          <a:lstStyle/>
-          <a:p>
-            <a:pPr algn="l">
-              <a:spcAft>
-                <a:spcPts val="0"/>
-              </a:spcAft>
-            </a:pPr>
-            <a:r>
-              <a:rPr sz="1150" b="0" i="0">
-                <a:solidFill>
-                  <a:srgbClr val="B4C7D2"/>
-                </a:solidFill>
-                <a:latin typeface="Arial"/>
-              </a:rPr>
-              <a:t>• η_E = 0.20 → E_solid = 10 nJ</a:t>
-            </a:r>
-          </a:p>
-        </p:txBody>
-      </p:sp>
-      <p:sp>
-        <p:nvSpPr>
-          <p:cNvPr id="17" name="C4-E29 text 15" descr="sci-ppt:o015"/>
-          <p:cNvSpPr txBox="1"/>
-          <p:nvPr/>
-        </p:nvSpPr>
-        <p:spPr>
-          <a:xfrm>
-            <a:off x="320040" y="4562856"/>
-            <a:ext cx="5715000" cy="246888"/>
-          </a:xfrm>
-          <a:prstGeom prst="rect">
-            <a:avLst/>
-          </a:prstGeom>
-          <a:noFill/>
-          <a:effectLst/>
-        </p:spPr>
-        <p:txBody>
-          <a:bodyPr wrap="square" lIns="27432" rIns="27432" tIns="18288" bIns="18288" anchor="ctr">
-            <a:spAutoFit/>
-          </a:bodyPr>
-          <a:lstStyle/>
-          <a:p>
-            <a:pPr algn="l">
-              <a:spcAft>
-                <a:spcPts val="0"/>
-              </a:spcAft>
-            </a:pPr>
-            <a:r>
-              <a:rPr sz="1150" b="0" i="0">
-                <a:solidFill>
-                  <a:srgbClr val="B4C7D2"/>
-                </a:solidFill>
-                <a:latin typeface="Arial"/>
-              </a:rPr>
-              <a:t>• η_I = 0.50 → I_net = 1.5666×10⁻⁹ N s</a:t>
-            </a:r>
-          </a:p>
-        </p:txBody>
-      </p:sp>
-      <p:sp>
-        <p:nvSpPr>
-          <p:cNvPr id="18" name="C4-E29 text 16" descr="sci-ppt:o016"/>
-          <p:cNvSpPr txBox="1"/>
-          <p:nvPr/>
-        </p:nvSpPr>
-        <p:spPr>
-          <a:xfrm>
-            <a:off x="6217920" y="4562856"/>
-            <a:ext cx="5715000" cy="246888"/>
-          </a:xfrm>
-          <a:prstGeom prst="rect">
-            <a:avLst/>
-          </a:prstGeom>
-          <a:noFill/>
-          <a:effectLst/>
-        </p:spPr>
-        <p:txBody>
-          <a:bodyPr wrap="square" lIns="27432" rIns="27432" tIns="18288" bIns="18288" anchor="ctr">
-            <a:spAutoFit/>
-          </a:bodyPr>
-          <a:lstStyle/>
-          <a:p>
-            <a:pPr algn="l">
-              <a:spcAft>
-                <a:spcPts val="0"/>
-              </a:spcAft>
-            </a:pPr>
-            <a:r>
-              <a:rPr sz="1150" b="0" i="0">
-                <a:solidFill>
-                  <a:srgbClr val="B4C7D2"/>
-                </a:solidFill>
-                <a:latin typeface="Arial"/>
-              </a:rPr>
-              <a:t>• E_in, I_in — incoming array</a:t>
-            </a:r>
-          </a:p>
-        </p:txBody>
-      </p:sp>
-      <p:sp>
-        <p:nvSpPr>
-          <p:cNvPr id="19" name="C4-E29 text 17" descr="sci-ppt:o017"/>
-          <p:cNvSpPr txBox="1"/>
-          <p:nvPr/>
-        </p:nvSpPr>
-        <p:spPr>
-          <a:xfrm>
-            <a:off x="320040" y="5596128"/>
-            <a:ext cx="11430000" cy="292608"/>
-          </a:xfrm>
-          <a:prstGeom prst="rect">
-            <a:avLst/>
-          </a:prstGeom>
-          <a:noFill/>
-          <a:effectLst/>
-        </p:spPr>
-        <p:txBody>
-          <a:bodyPr wrap="square" lIns="27432" rIns="27432" tIns="18288" bIns="18288" anchor="ctr">
-            <a:spAutoFit/>
-          </a:bodyPr>
-          <a:lstStyle/>
-          <a:p>
-            <a:pPr algn="l">
-              <a:spcAft>
-                <a:spcPts val="0"/>
-              </a:spcAft>
-            </a:pPr>
-            <a:r>
-              <a:rPr sz="1150" b="0" i="0">
-                <a:solidFill>
-                  <a:srgbClr val="8EDBD4"/>
-                </a:solidFill>
-                <a:latin typeface="Arial"/>
-              </a:rPr>
-              <a:t>Load-path coupling fractions are assumptions.</a:t>
-            </a:r>
-          </a:p>
-        </p:txBody>
-      </p:sp>
-      <p:sp>
-        <p:nvSpPr>
-          <p:cNvPr id="20" name="C4-E29 text 18" descr="sci-ppt:o018"/>
-          <p:cNvSpPr txBox="1"/>
-          <p:nvPr/>
-        </p:nvSpPr>
-        <p:spPr>
-          <a:xfrm>
-            <a:off x="320040" y="5870448"/>
-            <a:ext cx="11430000" cy="292608"/>
-          </a:xfrm>
-          <a:prstGeom prst="rect">
-            <a:avLst/>
-          </a:prstGeom>
-          <a:noFill/>
-          <a:effectLst/>
-        </p:spPr>
-        <p:txBody>
-          <a:bodyPr wrap="square" lIns="27432" rIns="27432" tIns="18288" bIns="18288" anchor="ctr">
-            <a:spAutoFit/>
-          </a:bodyPr>
-          <a:lstStyle/>
-          <a:p>
-            <a:pPr algn="l">
-              <a:spcAft>
-                <a:spcPts val="0"/>
-              </a:spcAft>
-            </a:pPr>
-            <a:r>
-              <a:rPr sz="1150" b="0" i="0">
-                <a:solidFill>
-                  <a:srgbClr val="8EDBD4"/>
-                </a:solidFill>
-                <a:latin typeface="Arial"/>
-              </a:rPr>
-              <a:t>This payload differs from the blister benchmark.</a:t>
-            </a:r>
-          </a:p>
-        </p:txBody>
-      </p:sp>
-      <p:sp>
-        <p:nvSpPr>
-          <p:cNvPr id="21" name="C4-E29 text 19" descr="sci-ppt:o019"/>
-          <p:cNvSpPr txBox="1"/>
-          <p:nvPr/>
-        </p:nvSpPr>
-        <p:spPr>
-          <a:xfrm>
-            <a:off x="320040" y="6473952"/>
-            <a:ext cx="11430000" cy="256032"/>
-          </a:xfrm>
-          <a:prstGeom prst="rect">
-            <a:avLst/>
-          </a:prstGeom>
-          <a:noFill/>
-          <a:effectLst/>
-        </p:spPr>
-        <p:txBody>
-          <a:bodyPr wrap="square" lIns="27432" rIns="27432" tIns="18288" bIns="18288" anchor="ctr">
+          <a:bodyPr wrap="none" lIns="18288" rIns="18288" tIns="18288" bIns="18288" anchor="t">
             <a:spAutoFit/>
           </a:bodyPr>
           <a:lstStyle/>
@@ -3817,7 +4179,7 @@
                 </a:solidFill>
                 <a:latin typeface="Arial"/>
               </a:rPr>
-              <a:t>Model schematic; geometry is not to scale.</a:t>
+              <a:t>Coupling allocation of Eq. C4-E29 (declared teaching values).</a:t>
             </a:r>
           </a:p>
         </p:txBody>
